--- a/lighting_tool/drawings/27PR_二层照明施工图_RevK-B_英式.pptx
+++ b/lighting_tool/drawings/27PR_二层照明施工图_RevK-B_英式.pptx
@@ -13170,7 +13170,7 @@
         </p:nvSpPr>
         <p:spPr>
           <a:xfrm>
-            <a:off x="3173570" y="3448742"/>
+            <a:off x="2968215" y="3448742"/>
             <a:ext cx="27000" cy="27000"/>
           </a:xfrm>
           <a:prstGeom prst="ellipse">
@@ -13214,8 +13214,8 @@
         </p:nvCxnSpPr>
         <p:spPr>
           <a:xfrm flipV="1">
-            <a:off x="3187070" y="3402491"/>
-            <a:ext cx="50138" cy="59751"/>
+            <a:off x="2981715" y="3402491"/>
+            <a:ext cx="50137" cy="59751"/>
           </a:xfrm>
           <a:prstGeom prst="line">
             <a:avLst/>
@@ -13249,7 +13249,7 @@
         </p:nvCxnSpPr>
         <p:spPr>
           <a:xfrm>
-            <a:off x="3237208" y="3402491"/>
+            <a:off x="3031852" y="3402491"/>
             <a:ext cx="14938" cy="12534"/>
           </a:xfrm>
           <a:prstGeom prst="line">
@@ -13284,7 +13284,7 @@
         </p:nvSpPr>
         <p:spPr>
           <a:xfrm>
-            <a:off x="2937070" y="3492242"/>
+            <a:off x="2731715" y="3492242"/>
             <a:ext cx="240000" cy="120000"/>
           </a:xfrm>
           <a:prstGeom prst="rect">
@@ -24812,8 +24812,8 @@
         </p:nvCxnSpPr>
         <p:spPr>
           <a:xfrm flipV="1">
-            <a:off x="4680480" y="2773157"/>
-            <a:ext cx="573677" cy="456103"/>
+            <a:off x="4378651" y="2773157"/>
+            <a:ext cx="875506" cy="456103"/>
           </a:xfrm>
           <a:prstGeom prst="line">
             <a:avLst/>
@@ -24847,7 +24847,7 @@
         </p:nvSpPr>
         <p:spPr>
           <a:xfrm>
-            <a:off x="4781267" y="2999624"/>
+            <a:off x="4585078" y="2999624"/>
             <a:ext cx="200000" cy="140000"/>
           </a:xfrm>
           <a:prstGeom prst="ellipse">
@@ -24893,7 +24893,7 @@
         </p:nvSpPr>
         <p:spPr>
           <a:xfrm>
-            <a:off x="4781267" y="2999624"/>
+            <a:off x="4585078" y="2999624"/>
             <a:ext cx="200000" cy="140000"/>
           </a:xfrm>
           <a:prstGeom prst="rect">
@@ -25044,8 +25044,8 @@
         </p:nvSpPr>
         <p:spPr>
           <a:xfrm>
-            <a:off x="4408508" y="2312106"/>
-            <a:ext cx="278101" cy="917154"/>
+            <a:off x="4378651" y="2312106"/>
+            <a:ext cx="107077" cy="917154"/>
           </a:xfrm>
           <a:custGeom>
             <a:avLst/>
@@ -25054,57 +25054,57 @@
             <a:cxnLst/>
             <a:rect l="l" t="t" r="r" b="b"/>
             <a:pathLst>
-              <a:path w="278101" h="917154">
+              <a:path w="107077" h="917154">
                 <a:moveTo>
-                  <a:pt x="271972" y="917154"/>
+                  <a:pt x="0" y="917154"/>
                 </a:moveTo>
                 <a:lnTo>
-                  <a:pt x="276470" y="853458"/>
+                  <a:pt x="23362" y="860532"/>
                 </a:lnTo>
                 <a:lnTo>
-                  <a:pt x="278101" y="790611"/>
+                  <a:pt x="43858" y="803816"/>
                 </a:lnTo>
                 <a:lnTo>
-                  <a:pt x="276866" y="728615"/>
+                  <a:pt x="61487" y="747007"/>
                 </a:lnTo>
                 <a:lnTo>
-                  <a:pt x="272766" y="667468"/>
+                  <a:pt x="76251" y="690105"/>
                 </a:lnTo>
                 <a:lnTo>
-                  <a:pt x="265799" y="607171"/>
+                  <a:pt x="88148" y="633109"/>
                 </a:lnTo>
                 <a:lnTo>
-                  <a:pt x="255966" y="547724"/>
+                  <a:pt x="97180" y="576020"/>
                 </a:lnTo>
                 <a:lnTo>
-                  <a:pt x="243267" y="489127"/>
+                  <a:pt x="103345" y="518838"/>
                 </a:lnTo>
                 <a:lnTo>
-                  <a:pt x="227701" y="431380"/>
+                  <a:pt x="106644" y="461563"/>
                 </a:lnTo>
                 <a:lnTo>
-                  <a:pt x="209270" y="374483"/>
+                  <a:pt x="107077" y="404194"/>
                 </a:lnTo>
                 <a:lnTo>
-                  <a:pt x="187973" y="318435"/>
+                  <a:pt x="104644" y="346732"/>
                 </a:lnTo>
                 <a:lnTo>
-                  <a:pt x="163809" y="263238"/>
+                  <a:pt x="99345" y="289176"/>
                 </a:lnTo>
                 <a:lnTo>
-                  <a:pt x="136779" y="208890"/>
+                  <a:pt x="91179" y="231528"/>
                 </a:lnTo>
                 <a:lnTo>
-                  <a:pt x="106884" y="155393"/>
+                  <a:pt x="80148" y="173786"/>
                 </a:lnTo>
                 <a:lnTo>
-                  <a:pt x="74122" y="102745"/>
+                  <a:pt x="66250" y="115950"/>
                 </a:lnTo>
                 <a:lnTo>
-                  <a:pt x="38494" y="50948"/>
+                  <a:pt x="49487" y="58022"/>
                 </a:lnTo>
                 <a:lnTo>
-                  <a:pt x="0" y="0"/>
+                  <a:pt x="29857" y="0"/>
                 </a:lnTo>
               </a:path>
             </a:pathLst>
@@ -27657,7 +27657,7 @@
         </p:nvSpPr>
         <p:spPr>
           <a:xfrm>
-            <a:off x="4655045" y="3203825"/>
+            <a:off x="4353216" y="3203825"/>
             <a:ext cx="50869" cy="50869"/>
           </a:xfrm>
           <a:prstGeom prst="ellipse">
@@ -27701,7 +27701,7 @@
         </p:nvCxnSpPr>
         <p:spPr>
           <a:xfrm flipV="1">
-            <a:off x="4680480" y="3116684"/>
+            <a:off x="4378651" y="3116684"/>
             <a:ext cx="94462" cy="112576"/>
           </a:xfrm>
           <a:prstGeom prst="line">
@@ -27736,7 +27736,7 @@
         </p:nvCxnSpPr>
         <p:spPr>
           <a:xfrm>
-            <a:off x="4774942" y="3116684"/>
+            <a:off x="4473113" y="3116684"/>
             <a:ext cx="28144" cy="23616"/>
           </a:xfrm>
           <a:prstGeom prst="line">
@@ -27771,7 +27771,7 @@
         </p:nvSpPr>
         <p:spPr>
           <a:xfrm>
-            <a:off x="4789073" y="2984203"/>
+            <a:off x="4487244" y="2984203"/>
             <a:ext cx="233172" cy="194310"/>
           </a:xfrm>
           <a:prstGeom prst="roundRect">
@@ -27817,7 +27817,7 @@
         </p:nvSpPr>
         <p:spPr>
           <a:xfrm>
-            <a:off x="4789073" y="2984203"/>
+            <a:off x="4487244" y="2984203"/>
             <a:ext cx="233172" cy="194310"/>
           </a:xfrm>
           <a:prstGeom prst="rect">
@@ -28934,7 +28934,7 @@
                 </a:solidFill>
                 <a:latin typeface="Microsoft YaHei"/>
               </a:rPr>
-              <a:t>S3  1 联 · 主卧南墙（衣帽间那面墙）主卧一侧，C19 西侧</a:t>
+              <a:t>S3  1 联 · 主卧南墙（衣帽间那面墙）主卧一侧，墙中间</a:t>
             </a:r>
           </a:p>
         </p:txBody>
@@ -43728,7 +43728,7 @@
                           </a:solidFill>
                           <a:latin typeface="Microsoft YaHei"/>
                         </a:rPr>
-                        <a:t>主卧南墙（衣帽间那面墙）主卧一侧，C19 西侧</a:t>
+                        <a:t>主卧南墙（衣帽间那面墙）主卧一侧，墙中间</a:t>
                       </a:r>
                     </a:p>
                   </a:txBody>

--- a/lighting_tool/drawings/27PR_二层照明施工图_RevK-B_英式.pptx
+++ b/lighting_tool/drawings/27PR_二层照明施工图_RevK-B_英式.pptx
@@ -13170,7 +13170,7 @@
         </p:nvSpPr>
         <p:spPr>
           <a:xfrm>
-            <a:off x="2968215" y="3448742"/>
+            <a:off x="3387665" y="3448742"/>
             <a:ext cx="27000" cy="27000"/>
           </a:xfrm>
           <a:prstGeom prst="ellipse">
@@ -13214,8 +13214,8 @@
         </p:nvCxnSpPr>
         <p:spPr>
           <a:xfrm flipV="1">
-            <a:off x="2981715" y="3402491"/>
-            <a:ext cx="50137" cy="59751"/>
+            <a:off x="3401165" y="3402491"/>
+            <a:ext cx="50138" cy="59751"/>
           </a:xfrm>
           <a:prstGeom prst="line">
             <a:avLst/>
@@ -13249,7 +13249,7 @@
         </p:nvCxnSpPr>
         <p:spPr>
           <a:xfrm>
-            <a:off x="3031852" y="3402491"/>
+            <a:off x="3451303" y="3402491"/>
             <a:ext cx="14938" cy="12534"/>
           </a:xfrm>
           <a:prstGeom prst="line">
@@ -13284,7 +13284,7 @@
         </p:nvSpPr>
         <p:spPr>
           <a:xfrm>
-            <a:off x="2731715" y="3492242"/>
+            <a:off x="3151165" y="3492242"/>
             <a:ext cx="240000" cy="120000"/>
           </a:xfrm>
           <a:prstGeom prst="rect">
@@ -24812,8 +24812,8 @@
         </p:nvCxnSpPr>
         <p:spPr>
           <a:xfrm flipV="1">
-            <a:off x="4378651" y="2773157"/>
-            <a:ext cx="875506" cy="456103"/>
+            <a:off x="4995153" y="2773157"/>
+            <a:ext cx="259004" cy="456103"/>
           </a:xfrm>
           <a:prstGeom prst="line">
             <a:avLst/>
@@ -24847,7 +24847,7 @@
         </p:nvSpPr>
         <p:spPr>
           <a:xfrm>
-            <a:off x="4585078" y="2999624"/>
+            <a:off x="4985805" y="2999624"/>
             <a:ext cx="200000" cy="140000"/>
           </a:xfrm>
           <a:prstGeom prst="ellipse">
@@ -24893,7 +24893,7 @@
         </p:nvSpPr>
         <p:spPr>
           <a:xfrm>
-            <a:off x="4585078" y="2999624"/>
+            <a:off x="4985805" y="2999624"/>
             <a:ext cx="200000" cy="140000"/>
           </a:xfrm>
           <a:prstGeom prst="rect">
@@ -25044,8 +25044,8 @@
         </p:nvSpPr>
         <p:spPr>
           <a:xfrm>
-            <a:off x="4378651" y="2312106"/>
-            <a:ext cx="107077" cy="917154"/>
+            <a:off x="4408508" y="2312106"/>
+            <a:ext cx="586645" cy="917154"/>
           </a:xfrm>
           <a:custGeom>
             <a:avLst/>
@@ -25054,57 +25054,57 @@
             <a:cxnLst/>
             <a:rect l="l" t="t" r="r" b="b"/>
             <a:pathLst>
-              <a:path w="107077" h="917154">
+              <a:path w="586645" h="917154">
                 <a:moveTo>
-                  <a:pt x="0" y="917154"/>
+                  <a:pt x="586645" y="917154"/>
                 </a:moveTo>
                 <a:lnTo>
-                  <a:pt x="23362" y="860532"/>
+                  <a:pt x="571476" y="846083"/>
                 </a:lnTo>
                 <a:lnTo>
-                  <a:pt x="43858" y="803816"/>
+                  <a:pt x="553440" y="776844"/>
                 </a:lnTo>
                 <a:lnTo>
-                  <a:pt x="61487" y="747007"/>
+                  <a:pt x="532538" y="709439"/>
                 </a:lnTo>
                 <a:lnTo>
-                  <a:pt x="76251" y="690105"/>
+                  <a:pt x="508771" y="643867"/>
                 </a:lnTo>
                 <a:lnTo>
-                  <a:pt x="88148" y="633109"/>
+                  <a:pt x="482137" y="580129"/>
                 </a:lnTo>
                 <a:lnTo>
-                  <a:pt x="97180" y="576020"/>
+                  <a:pt x="452637" y="518223"/>
                 </a:lnTo>
                 <a:lnTo>
-                  <a:pt x="103345" y="518838"/>
+                  <a:pt x="420270" y="458151"/>
                 </a:lnTo>
                 <a:lnTo>
-                  <a:pt x="106644" y="461563"/>
+                  <a:pt x="385038" y="399913"/>
                 </a:lnTo>
                 <a:lnTo>
-                  <a:pt x="107077" y="404194"/>
+                  <a:pt x="346940" y="343507"/>
                 </a:lnTo>
                 <a:lnTo>
-                  <a:pt x="104644" y="346732"/>
+                  <a:pt x="305975" y="288935"/>
                 </a:lnTo>
                 <a:lnTo>
-                  <a:pt x="99345" y="289176"/>
+                  <a:pt x="262145" y="236196"/>
                 </a:lnTo>
                 <a:lnTo>
-                  <a:pt x="91179" y="231528"/>
+                  <a:pt x="215448" y="185290"/>
                 </a:lnTo>
                 <a:lnTo>
-                  <a:pt x="80148" y="173786"/>
+                  <a:pt x="165885" y="136218"/>
                 </a:lnTo>
                 <a:lnTo>
-                  <a:pt x="66250" y="115950"/>
+                  <a:pt x="113456" y="88978"/>
                 </a:lnTo>
                 <a:lnTo>
-                  <a:pt x="49487" y="58022"/>
+                  <a:pt x="58161" y="43572"/>
                 </a:lnTo>
                 <a:lnTo>
-                  <a:pt x="29857" y="0"/>
+                  <a:pt x="0" y="0"/>
                 </a:lnTo>
               </a:path>
             </a:pathLst>
@@ -27657,7 +27657,7 @@
         </p:nvSpPr>
         <p:spPr>
           <a:xfrm>
-            <a:off x="4353216" y="3203825"/>
+            <a:off x="4969718" y="3203825"/>
             <a:ext cx="50869" cy="50869"/>
           </a:xfrm>
           <a:prstGeom prst="ellipse">
@@ -27701,8 +27701,8 @@
         </p:nvCxnSpPr>
         <p:spPr>
           <a:xfrm flipV="1">
-            <a:off x="4378651" y="3116684"/>
-            <a:ext cx="94462" cy="112576"/>
+            <a:off x="4995153" y="3116684"/>
+            <a:ext cx="94463" cy="112576"/>
           </a:xfrm>
           <a:prstGeom prst="line">
             <a:avLst/>
@@ -27736,7 +27736,7 @@
         </p:nvCxnSpPr>
         <p:spPr>
           <a:xfrm>
-            <a:off x="4473113" y="3116684"/>
+            <a:off x="5089616" y="3116684"/>
             <a:ext cx="28144" cy="23616"/>
           </a:xfrm>
           <a:prstGeom prst="line">
@@ -27771,7 +27771,7 @@
         </p:nvSpPr>
         <p:spPr>
           <a:xfrm>
-            <a:off x="4487244" y="2984203"/>
+            <a:off x="5103746" y="2984203"/>
             <a:ext cx="233172" cy="194310"/>
           </a:xfrm>
           <a:prstGeom prst="roundRect">
@@ -27817,7 +27817,7 @@
         </p:nvSpPr>
         <p:spPr>
           <a:xfrm>
-            <a:off x="4487244" y="2984203"/>
+            <a:off x="5103746" y="2984203"/>
             <a:ext cx="233172" cy="194310"/>
           </a:xfrm>
           <a:prstGeom prst="rect">
@@ -28934,7 +28934,7 @@
                 </a:solidFill>
                 <a:latin typeface="Microsoft YaHei"/>
               </a:rPr>
-              <a:t>S3  1 联 · 主卧南墙（衣帽间那面墙）主卧一侧，墙中间</a:t>
+              <a:t>S3  1 联 · 主卧床头柜上方（C19 一侧，离地 700，与门口 S4 双控）</a:t>
             </a:r>
           </a:p>
         </p:txBody>
@@ -43728,7 +43728,7 @@
                           </a:solidFill>
                           <a:latin typeface="Microsoft YaHei"/>
                         </a:rPr>
-                        <a:t>主卧南墙（衣帽间那面墙）主卧一侧，墙中间</a:t>
+                        <a:t>主卧床头柜上方（C19 一侧，离地 700，与门口 S4 双控）</a:t>
                       </a:r>
                     </a:p>
                   </a:txBody>
